--- a/Khoroch-LSH26-T033-P12.pptx
+++ b/Khoroch-LSH26-T033-P12.pptx
@@ -11215,12 +11215,12 @@
         </p:nvSpPr>
         <p:spPr>
           <a:xfrm>
-            <a:off x="2331720" y="3337560"/>
-            <a:ext cx="13624560" cy="5440680"/>
+            <a:off x="4736592" y="3502152"/>
+            <a:ext cx="8814816" cy="5660136"/>
           </a:xfrm>
           <a:prstGeom prst="roundRect">
             <a:avLst>
-              <a:gd name="adj" fmla="val 2353"/>
+              <a:gd name="adj" fmla="val 969"/>
             </a:avLst>
           </a:prstGeom>
           <a:solidFill>
@@ -11245,8 +11245,8 @@
         </p:blipFill>
         <p:spPr>
           <a:xfrm>
-            <a:off x="2514600" y="3520440"/>
-            <a:ext cx="13258800" cy="5074920"/>
+            <a:off x="4937760" y="3703320"/>
+            <a:ext cx="8412480" cy="5257800"/>
           </a:xfrm>
           <a:prstGeom prst="rect">
             <a:avLst/>
@@ -11261,8 +11261,8 @@
         </p:nvSpPr>
         <p:spPr>
           <a:xfrm>
-            <a:off x="1417320" y="8851392"/>
-            <a:ext cx="15453360" cy="274320"/>
+            <a:off x="3566160" y="9162288"/>
+            <a:ext cx="11155680" cy="310896"/>
           </a:xfrm>
           <a:prstGeom prst="roundRect">
             <a:avLst>
@@ -11270,6 +11270,28 @@
             </a:avLst>
           </a:prstGeom>
           <a:solidFill>
+            <a:srgbClr val="1A0044"/>
+          </a:solidFill>
+          <a:ln/>
+        </p:spPr>
+      </p:sp>
+      <p:sp>
+        <p:nvSpPr>
+          <p:cNvPr id="10" name="Shape 7"/>
+          <p:cNvSpPr/>
+          <p:nvPr/>
+        </p:nvSpPr>
+        <p:spPr>
+          <a:xfrm>
+            <a:off x="8503920" y="9253728"/>
+            <a:ext cx="1280160" cy="118872"/>
+          </a:xfrm>
+          <a:prstGeom prst="roundRect">
+            <a:avLst>
+              <a:gd name="adj" fmla="val 50000"/>
+            </a:avLst>
+          </a:prstGeom>
+          <a:solidFill>
             <a:srgbClr val="4A3570"/>
           </a:solidFill>
           <a:ln/>
@@ -11277,13 +11299,13 @@
       </p:sp>
       <p:sp>
         <p:nvSpPr>
-          <p:cNvPr id="10" name="Text 7"/>
-          <p:cNvSpPr/>
-          <p:nvPr/>
-        </p:nvSpPr>
-        <p:spPr>
-          <a:xfrm>
-            <a:off x="1280160" y="9372600"/>
+          <p:cNvPr id="11" name="Text 8"/>
+          <p:cNvSpPr/>
+          <p:nvPr/>
+        </p:nvSpPr>
+        <p:spPr>
+          <a:xfrm>
+            <a:off x="1280160" y="9601200"/>
             <a:ext cx="15727680" cy="411480"/>
           </a:xfrm>
           <a:prstGeom prst="rect">
@@ -11316,7 +11338,7 @@
       </p:sp>
       <p:sp>
         <p:nvSpPr>
-          <p:cNvPr id="11" name="Text 8"/>
+          <p:cNvPr id="12" name="Text 9"/>
           <p:cNvSpPr/>
           <p:nvPr/>
         </p:nvSpPr>
@@ -12035,23 +12057,45 @@
         </p:nvSpPr>
         <p:spPr>
           <a:xfrm>
-            <a:off x="10332720" y="2103120"/>
-            <a:ext cx="3063240" cy="6949440"/>
+            <a:off x="10561320" y="2182190"/>
+            <a:ext cx="2990088" cy="6078068"/>
           </a:xfrm>
           <a:prstGeom prst="roundRect">
             <a:avLst>
-              <a:gd name="adj" fmla="val 10746"/>
+              <a:gd name="adj" fmla="val 4281"/>
             </a:avLst>
           </a:prstGeom>
           <a:solidFill>
-            <a:srgbClr val="1A0044"/>
+            <a:srgbClr val="C8C6CE"/>
+          </a:solidFill>
+          <a:ln/>
+        </p:spPr>
+      </p:sp>
+      <p:sp>
+        <p:nvSpPr>
+          <p:cNvPr id="20" name="Shape 18"/>
+          <p:cNvSpPr/>
+          <p:nvPr/>
+        </p:nvSpPr>
+        <p:spPr>
+          <a:xfrm>
+            <a:off x="10611612" y="2232482"/>
+            <a:ext cx="2889504" cy="5977484"/>
+          </a:xfrm>
+          <a:prstGeom prst="roundRect">
+            <a:avLst>
+              <a:gd name="adj" fmla="val 4114"/>
+            </a:avLst>
+          </a:prstGeom>
+          <a:solidFill>
+            <a:srgbClr val="0B0B0F"/>
           </a:solidFill>
           <a:ln/>
         </p:spPr>
       </p:sp>
       <p:pic>
         <p:nvPicPr>
-          <p:cNvPr id="20" name="Image 0" descr="slide-mobile.png">    </p:cNvPr>
+          <p:cNvPr id="21" name="Image 0" descr="slide-mobile.png">    </p:cNvPr>
           <p:cNvPicPr>
             <a:picLocks noChangeAspect="1"/>
           </p:cNvPicPr>
@@ -12065,8 +12109,8 @@
         </p:blipFill>
         <p:spPr>
           <a:xfrm>
-            <a:off x="10451592" y="2267712"/>
-            <a:ext cx="2825496" cy="6620256"/>
+            <a:off x="10730484" y="2351354"/>
+            <a:ext cx="2651760" cy="5739740"/>
           </a:xfrm>
           <a:prstGeom prst="rect">
             <a:avLst/>
@@ -12075,29 +12119,161 @@
       </p:pic>
       <p:sp>
         <p:nvSpPr>
-          <p:cNvPr id="21" name="Shape 18"/>
-          <p:cNvSpPr/>
-          <p:nvPr/>
-        </p:nvSpPr>
-        <p:spPr>
-          <a:xfrm>
-            <a:off x="13761720" y="2103120"/>
-            <a:ext cx="3063240" cy="6949440"/>
+          <p:cNvPr id="22" name="Shape 19"/>
+          <p:cNvSpPr/>
+          <p:nvPr/>
+        </p:nvSpPr>
+        <p:spPr>
+          <a:xfrm>
+            <a:off x="11690604" y="2252599"/>
+            <a:ext cx="731520" cy="60350"/>
           </a:xfrm>
           <a:prstGeom prst="roundRect">
             <a:avLst>
-              <a:gd name="adj" fmla="val 10746"/>
+              <a:gd name="adj" fmla="val 50000"/>
             </a:avLst>
           </a:prstGeom>
           <a:solidFill>
-            <a:srgbClr val="1A0044"/>
+            <a:srgbClr val="2A2A32"/>
+          </a:solidFill>
+          <a:ln/>
+        </p:spPr>
+      </p:sp>
+      <p:sp>
+        <p:nvSpPr>
+          <p:cNvPr id="23" name="Shape 20"/>
+          <p:cNvSpPr/>
+          <p:nvPr/>
+        </p:nvSpPr>
+        <p:spPr>
+          <a:xfrm>
+            <a:off x="10529316" y="3142310"/>
+            <a:ext cx="45720" cy="256032"/>
+          </a:xfrm>
+          <a:prstGeom prst="roundRect">
+            <a:avLst>
+              <a:gd name="adj" fmla="val 50000"/>
+            </a:avLst>
+          </a:prstGeom>
+          <a:solidFill>
+            <a:srgbClr val="A9A7B0"/>
+          </a:solidFill>
+          <a:ln/>
+        </p:spPr>
+      </p:sp>
+      <p:sp>
+        <p:nvSpPr>
+          <p:cNvPr id="24" name="Shape 21"/>
+          <p:cNvSpPr/>
+          <p:nvPr/>
+        </p:nvSpPr>
+        <p:spPr>
+          <a:xfrm>
+            <a:off x="10529316" y="3553790"/>
+            <a:ext cx="45720" cy="438912"/>
+          </a:xfrm>
+          <a:prstGeom prst="roundRect">
+            <a:avLst>
+              <a:gd name="adj" fmla="val 50000"/>
+            </a:avLst>
+          </a:prstGeom>
+          <a:solidFill>
+            <a:srgbClr val="A9A7B0"/>
+          </a:solidFill>
+          <a:ln/>
+        </p:spPr>
+      </p:sp>
+      <p:sp>
+        <p:nvSpPr>
+          <p:cNvPr id="25" name="Shape 22"/>
+          <p:cNvSpPr/>
+          <p:nvPr/>
+        </p:nvSpPr>
+        <p:spPr>
+          <a:xfrm>
+            <a:off x="10529316" y="4120718"/>
+            <a:ext cx="45720" cy="438912"/>
+          </a:xfrm>
+          <a:prstGeom prst="roundRect">
+            <a:avLst>
+              <a:gd name="adj" fmla="val 50000"/>
+            </a:avLst>
+          </a:prstGeom>
+          <a:solidFill>
+            <a:srgbClr val="A9A7B0"/>
+          </a:solidFill>
+          <a:ln/>
+        </p:spPr>
+      </p:sp>
+      <p:sp>
+        <p:nvSpPr>
+          <p:cNvPr id="26" name="Shape 23"/>
+          <p:cNvSpPr/>
+          <p:nvPr/>
+        </p:nvSpPr>
+        <p:spPr>
+          <a:xfrm>
+            <a:off x="13537692" y="3754958"/>
+            <a:ext cx="45720" cy="640080"/>
+          </a:xfrm>
+          <a:prstGeom prst="roundRect">
+            <a:avLst>
+              <a:gd name="adj" fmla="val 50000"/>
+            </a:avLst>
+          </a:prstGeom>
+          <a:solidFill>
+            <a:srgbClr val="A9A7B0"/>
+          </a:solidFill>
+          <a:ln/>
+        </p:spPr>
+      </p:sp>
+      <p:sp>
+        <p:nvSpPr>
+          <p:cNvPr id="27" name="Shape 24"/>
+          <p:cNvSpPr/>
+          <p:nvPr/>
+        </p:nvSpPr>
+        <p:spPr>
+          <a:xfrm>
+            <a:off x="14127480" y="2182190"/>
+            <a:ext cx="2990088" cy="6078068"/>
+          </a:xfrm>
+          <a:prstGeom prst="roundRect">
+            <a:avLst>
+              <a:gd name="adj" fmla="val 4281"/>
+            </a:avLst>
+          </a:prstGeom>
+          <a:solidFill>
+            <a:srgbClr val="C8C6CE"/>
+          </a:solidFill>
+          <a:ln/>
+        </p:spPr>
+      </p:sp>
+      <p:sp>
+        <p:nvSpPr>
+          <p:cNvPr id="28" name="Shape 25"/>
+          <p:cNvSpPr/>
+          <p:nvPr/>
+        </p:nvSpPr>
+        <p:spPr>
+          <a:xfrm>
+            <a:off x="14177772" y="2232482"/>
+            <a:ext cx="2889504" cy="5977484"/>
+          </a:xfrm>
+          <a:prstGeom prst="roundRect">
+            <a:avLst>
+              <a:gd name="adj" fmla="val 4114"/>
+            </a:avLst>
+          </a:prstGeom>
+          <a:solidFill>
+            <a:srgbClr val="0B0B0F"/>
           </a:solidFill>
           <a:ln/>
         </p:spPr>
       </p:sp>
       <p:pic>
         <p:nvPicPr>
-          <p:cNvPr id="22" name="Image 1" descr="slide-mobile2.png">    </p:cNvPr>
+          <p:cNvPr id="29" name="Image 1" descr="slide-mobile2.png">    </p:cNvPr>
           <p:cNvPicPr>
             <a:picLocks noChangeAspect="1"/>
           </p:cNvPicPr>
@@ -12111,8 +12287,8 @@
         </p:blipFill>
         <p:spPr>
           <a:xfrm>
-            <a:off x="13880592" y="2267712"/>
-            <a:ext cx="2825496" cy="6620256"/>
+            <a:off x="14296644" y="2351354"/>
+            <a:ext cx="2651760" cy="5739740"/>
           </a:xfrm>
           <a:prstGeom prst="rect">
             <a:avLst/>
@@ -12121,7 +12297,117 @@
       </p:pic>
       <p:sp>
         <p:nvSpPr>
-          <p:cNvPr id="23" name="Text 19"/>
+          <p:cNvPr id="30" name="Shape 26"/>
+          <p:cNvSpPr/>
+          <p:nvPr/>
+        </p:nvSpPr>
+        <p:spPr>
+          <a:xfrm>
+            <a:off x="15256764" y="2252599"/>
+            <a:ext cx="731520" cy="60350"/>
+          </a:xfrm>
+          <a:prstGeom prst="roundRect">
+            <a:avLst>
+              <a:gd name="adj" fmla="val 50000"/>
+            </a:avLst>
+          </a:prstGeom>
+          <a:solidFill>
+            <a:srgbClr val="2A2A32"/>
+          </a:solidFill>
+          <a:ln/>
+        </p:spPr>
+      </p:sp>
+      <p:sp>
+        <p:nvSpPr>
+          <p:cNvPr id="31" name="Shape 27"/>
+          <p:cNvSpPr/>
+          <p:nvPr/>
+        </p:nvSpPr>
+        <p:spPr>
+          <a:xfrm>
+            <a:off x="14095476" y="3142310"/>
+            <a:ext cx="45720" cy="256032"/>
+          </a:xfrm>
+          <a:prstGeom prst="roundRect">
+            <a:avLst>
+              <a:gd name="adj" fmla="val 50000"/>
+            </a:avLst>
+          </a:prstGeom>
+          <a:solidFill>
+            <a:srgbClr val="A9A7B0"/>
+          </a:solidFill>
+          <a:ln/>
+        </p:spPr>
+      </p:sp>
+      <p:sp>
+        <p:nvSpPr>
+          <p:cNvPr id="32" name="Shape 28"/>
+          <p:cNvSpPr/>
+          <p:nvPr/>
+        </p:nvSpPr>
+        <p:spPr>
+          <a:xfrm>
+            <a:off x="14095476" y="3553790"/>
+            <a:ext cx="45720" cy="438912"/>
+          </a:xfrm>
+          <a:prstGeom prst="roundRect">
+            <a:avLst>
+              <a:gd name="adj" fmla="val 50000"/>
+            </a:avLst>
+          </a:prstGeom>
+          <a:solidFill>
+            <a:srgbClr val="A9A7B0"/>
+          </a:solidFill>
+          <a:ln/>
+        </p:spPr>
+      </p:sp>
+      <p:sp>
+        <p:nvSpPr>
+          <p:cNvPr id="33" name="Shape 29"/>
+          <p:cNvSpPr/>
+          <p:nvPr/>
+        </p:nvSpPr>
+        <p:spPr>
+          <a:xfrm>
+            <a:off x="14095476" y="4120718"/>
+            <a:ext cx="45720" cy="438912"/>
+          </a:xfrm>
+          <a:prstGeom prst="roundRect">
+            <a:avLst>
+              <a:gd name="adj" fmla="val 50000"/>
+            </a:avLst>
+          </a:prstGeom>
+          <a:solidFill>
+            <a:srgbClr val="A9A7B0"/>
+          </a:solidFill>
+          <a:ln/>
+        </p:spPr>
+      </p:sp>
+      <p:sp>
+        <p:nvSpPr>
+          <p:cNvPr id="34" name="Shape 30"/>
+          <p:cNvSpPr/>
+          <p:nvPr/>
+        </p:nvSpPr>
+        <p:spPr>
+          <a:xfrm>
+            <a:off x="17103852" y="3754958"/>
+            <a:ext cx="45720" cy="640080"/>
+          </a:xfrm>
+          <a:prstGeom prst="roundRect">
+            <a:avLst>
+              <a:gd name="adj" fmla="val 50000"/>
+            </a:avLst>
+          </a:prstGeom>
+          <a:solidFill>
+            <a:srgbClr val="A9A7B0"/>
+          </a:solidFill>
+          <a:ln/>
+        </p:spPr>
+      </p:sp>
+      <p:sp>
+        <p:nvSpPr>
+          <p:cNvPr id="35" name="Text 31"/>
           <p:cNvSpPr/>
           <p:nvPr/>
         </p:nvSpPr>
